--- a/media/exports/reports/2026-05/people-helped.pptx
+++ b/media/exports/reports/2026-05/people-helped.pptx
@@ -193,16 +193,16 @@
                   <c:v>Digital literacy</c:v>
                 </c:pt>
                 <c:pt idx="1">
-                  <c:v>Housing support</c:v>
+                  <c:v>Youth outreach</c:v>
                 </c:pt>
                 <c:pt idx="2">
-                  <c:v>Youth outreach</c:v>
+                  <c:v>Community meals</c:v>
                 </c:pt>
                 <c:pt idx="3">
                   <c:v>Mental health first aid</c:v>
                 </c:pt>
                 <c:pt idx="4">
-                  <c:v>Community meals</c:v>
+                  <c:v>Housing support</c:v>
                 </c:pt>
               </c:strCache>
             </c:strRef>
@@ -217,16 +217,16 @@
                   <c:v>83.1</c:v>
                 </c:pt>
                 <c:pt idx="1">
-                  <c:v>87.8</c:v>
+                  <c:v>87.7</c:v>
                 </c:pt>
                 <c:pt idx="2">
-                  <c:v>89.1</c:v>
+                  <c:v>89.3</c:v>
                 </c:pt>
                 <c:pt idx="3">
                   <c:v>90.1</c:v>
                 </c:pt>
                 <c:pt idx="4">
-                  <c:v>90.3</c:v>
+                  <c:v>91.0</c:v>
                 </c:pt>
               </c:numCache>
             </c:numRef>
@@ -290,7 +290,7 @@
       <c:valAx>
         <c:axId val="-2113994440"/>
         <c:scaling>
-          <c:max val="103.84499999999998"/>
+          <c:max val="104.64999999999999"/>
           <c:min val="0.0"/>
         </c:scaling>
         <c:delete/>
@@ -1075,7 +1075,7 @@
           <a:lstStyle/>
           <a:p>
             <a:r>
-              <a:t>How many people did we help this month, and how many couldn't we reach?. People helped, May: 487; Couldn't reach, May: 62; Share reached, May: 88.7%. 487 people were helped in May, and 62 came to a program but couldn't be helped: 88.7% reached (target 90.0%), against 88.2% in April. Digital literacy reached the smallest share: 83.1% (10 couldn't be helped). The main reason: program at capacity (23 people).</a:t>
+              <a:t>How many people did we help this month, and how many couldn't we reach?. People helped, May: 487; Couldn't reach, May: 62; Share reached, May: 88.7%. 487 people were helped in May, and 62 came to a program but couldn't be helped: 88.7% reached (target 90.0%), against 84.1% in April. Digital literacy reached the smallest share: 83.1% (10 couldn't be helped). The main reason: program at capacity (22 people).</a:t>
             </a:r>
           </a:p>
         </p:txBody>
@@ -4630,7 +4630,7 @@
                 </a:solidFill>
                 <a:latin typeface="Roboto"/>
               </a:rPr>
-              <a:t>Data retrieved 2pm, Tue 6 Oct 2026 · Generated 8 Oct 2026, 6:29pm · Sample data · Made with Python (python-pptx)</a:t>
+              <a:t>Data retrieved 2pm, Tue 6 Oct 2026 · Generated 8 Oct 2026, 11:41pm · Sample data · Made with Python (python-pptx)</a:t>
             </a:r>
           </a:p>
         </p:txBody>
@@ -5181,7 +5181,7 @@
                 </a:solidFill>
                 <a:latin typeface="Roboto"/>
               </a:rPr>
-              <a:t>April 66</a:t>
+              <a:t>April 93</a:t>
             </a:r>
           </a:p>
         </p:txBody>
@@ -5378,7 +5378,7 @@
         </p:nvCxnSpPr>
         <p:spPr>
           <a:xfrm>
-            <a:off x="9509171" y="2623108"/>
+            <a:off x="9465565" y="2623108"/>
             <a:ext cx="0" cy="2333549"/>
           </a:xfrm>
           <a:prstGeom prst="line">
@@ -5414,7 +5414,7 @@
         </p:nvSpPr>
         <p:spPr>
           <a:xfrm>
-            <a:off x="8411891" y="4956657"/>
+            <a:off x="8368285" y="4956657"/>
             <a:ext cx="2194560" cy="237744"/>
           </a:xfrm>
           <a:prstGeom prst="rect">
@@ -5567,7 +5567,7 @@
                 </a:solidFill>
                 <a:latin typeface="Roboto"/>
               </a:rPr>
-              <a:t>487 people were helped in May, and 62 came to a program but couldn't be helped: 88.7% reached (target 90.0%), against 88.2% in April.</a:t>
+              <a:t>487 people were helped in May, and 62 came to a program but couldn't be helped: 88.7% reached (target 90.0%), against 84.1% in April.</a:t>
             </a:r>
           </a:p>
         </p:txBody>
@@ -5694,7 +5694,7 @@
                 </a:solidFill>
                 <a:latin typeface="Roboto"/>
               </a:rPr>
-              <a:t>Digital literacy reached the smallest share: 83.1% (10 couldn't be helped). The main reason: program at capacity (23 people).</a:t>
+              <a:t>Digital literacy reached the smallest share: 83.1% (10 couldn't be helped). The main reason: program at capacity (22 people).</a:t>
             </a:r>
           </a:p>
         </p:txBody>
@@ -5772,7 +5772,7 @@
                 </a:solidFill>
                 <a:latin typeface="Roboto"/>
               </a:rPr>
-              <a:t>Data retrieved 2pm, Tue 6 Oct 2026 · Generated 8 Oct 2026, 6:29pm · Sample data · Made with Python (python-pptx)</a:t>
+              <a:t>Data retrieved 2pm, Tue 6 Oct 2026 · Generated 8 Oct 2026, 11:41pm · Sample data · Made with Python (python-pptx)</a:t>
             </a:r>
           </a:p>
         </p:txBody>
@@ -6087,7 +6087,7 @@
                 </a:solidFill>
                 <a:latin typeface="Roboto"/>
               </a:rPr>
-              <a:t>Data retrieved 2pm, Tue 6 Oct 2026 · Generated 8 Oct 2026, 6:29pm · Sample data · Made with Python (python-pptx)</a:t>
+              <a:t>Data retrieved 2pm, Tue 6 Oct 2026 · Generated 8 Oct 2026, 11:41pm · Sample data · Made with Python (python-pptx)</a:t>
             </a:r>
           </a:p>
         </p:txBody>
@@ -6395,7 +6395,7 @@
                           </a:solidFill>
                           <a:latin typeface="Roboto"/>
                         </a:rPr>
-                        <a:t>23</a:t>
+                        <a:t>22</a:t>
                       </a:r>
                     </a:p>
                   </a:txBody>
@@ -6451,7 +6451,7 @@
                           </a:solidFill>
                           <a:latin typeface="Roboto"/>
                         </a:rPr>
-                        <a:t>17</a:t>
+                        <a:t>19</a:t>
                       </a:r>
                     </a:p>
                   </a:txBody>
@@ -6507,7 +6507,7 @@
                           </a:solidFill>
                           <a:latin typeface="Roboto"/>
                         </a:rPr>
-                        <a:t>8</a:t>
+                        <a:t>10</a:t>
                       </a:r>
                     </a:p>
                   </a:txBody>
@@ -6563,7 +6563,7 @@
                           </a:solidFill>
                           <a:latin typeface="Roboto"/>
                         </a:rPr>
-                        <a:t>7</a:t>
+                        <a:t>6</a:t>
                       </a:r>
                     </a:p>
                   </a:txBody>
@@ -6619,7 +6619,7 @@
                           </a:solidFill>
                           <a:latin typeface="Roboto"/>
                         </a:rPr>
-                        <a:t>7</a:t>
+                        <a:t>5</a:t>
                       </a:r>
                     </a:p>
                   </a:txBody>
@@ -6707,7 +6707,7 @@
                 </a:solidFill>
                 <a:latin typeface="Roboto"/>
               </a:rPr>
-              <a:t>Data retrieved 2pm, Tue 6 Oct 2026 · Generated 8 Oct 2026, 6:29pm · Sample data · Made with Python (python-pptx)</a:t>
+              <a:t>Data retrieved 2pm, Tue 6 Oct 2026 · Generated 8 Oct 2026, 11:41pm · Sample data · Made with Python (python-pptx)</a:t>
             </a:r>
           </a:p>
         </p:txBody>

--- a/media/exports/reports/2026-05/people-helped.pptx
+++ b/media/exports/reports/2026-05/people-helped.pptx
@@ -1005,7 +1005,7 @@
           <a:lstStyle/>
           <a:p>
             <a:r>
-              <a:t>How many people did we help this month, and how many couldn't we reach?. Sample Community Services Ltd. Period: May 2026. People helped by each program, day by day, and the people who came to a program but couldn't be helped (and why). People helped are counted against each program's own grant spend.</a:t>
+              <a:t>How many people did we help this month, and how many couldn't we reach?. Sample Community Services Ltd. Period: May 2026. In short: 487 people helped in May; 62 couldn't be reached (88.7% reached, target 90.0%). People helped by each program, day by day, and the people who came to a program but couldn't be helped (and why). People helped are counted against each program's own grant spend.</a:t>
             </a:r>
           </a:p>
         </p:txBody>
@@ -4440,7 +4440,7 @@
         <p:spPr>
           <a:xfrm>
             <a:off x="457200" y="3703320"/>
-            <a:ext cx="11277295" cy="535940"/>
+            <a:ext cx="11277295" cy="758190"/>
           </a:xfrm>
           <a:prstGeom prst="rect">
             <a:avLst/>
@@ -4465,7 +4465,7 @@
                 </a:solidFill>
                 <a:latin typeface="Roboto"/>
               </a:rPr>
-              <a:t>Period: May 2026. People helped by each program, day by day, and the people who came to a program but couldn't be helped (and why). People helped are counted against each program's own grant spend.</a:t>
+              <a:t>Period: May 2026. In short: 487 people helped in May; 62 couldn't be reached (88.7% reached, target 90.0%). People helped by each program, day by day, and the people who came to a program but couldn't be helped (and why). People helped are counted against each program's own grant spend.</a:t>
             </a:r>
           </a:p>
         </p:txBody>
@@ -4478,7 +4478,7 @@
         </p:nvSpPr>
         <p:spPr>
           <a:xfrm>
-            <a:off x="457200" y="4330700"/>
+            <a:off x="457200" y="4552950"/>
             <a:ext cx="11277295" cy="1097280"/>
           </a:xfrm>
           <a:prstGeom prst="rect">
@@ -4630,7 +4630,7 @@
                 </a:solidFill>
                 <a:latin typeface="Roboto"/>
               </a:rPr>
-              <a:t>Data retrieved 2pm, Tue 6 Oct 2026 · Generated 8 Oct 2026, 11:41pm · Sample data · Made with Python (python-pptx)</a:t>
+              <a:t>Data retrieved 2pm, Tue 6 Oct 2026 · Generated 10 Oct 2026, 9:55pm · Sample data · Made with Python (python-pptx)</a:t>
             </a:r>
           </a:p>
         </p:txBody>
@@ -5772,7 +5772,7 @@
                 </a:solidFill>
                 <a:latin typeface="Roboto"/>
               </a:rPr>
-              <a:t>Data retrieved 2pm, Tue 6 Oct 2026 · Generated 8 Oct 2026, 11:41pm · Sample data · Made with Python (python-pptx)</a:t>
+              <a:t>Data retrieved 2pm, Tue 6 Oct 2026 · Generated 10 Oct 2026, 9:55pm · Sample data · Made with Python (python-pptx)</a:t>
             </a:r>
           </a:p>
         </p:txBody>
@@ -6087,7 +6087,7 @@
                 </a:solidFill>
                 <a:latin typeface="Roboto"/>
               </a:rPr>
-              <a:t>Data retrieved 2pm, Tue 6 Oct 2026 · Generated 8 Oct 2026, 11:41pm · Sample data · Made with Python (python-pptx)</a:t>
+              <a:t>Data retrieved 2pm, Tue 6 Oct 2026 · Generated 10 Oct 2026, 9:55pm · Sample data · Made with Python (python-pptx)</a:t>
             </a:r>
           </a:p>
         </p:txBody>
@@ -6707,7 +6707,7 @@
                 </a:solidFill>
                 <a:latin typeface="Roboto"/>
               </a:rPr>
-              <a:t>Data retrieved 2pm, Tue 6 Oct 2026 · Generated 8 Oct 2026, 11:41pm · Sample data · Made with Python (python-pptx)</a:t>
+              <a:t>Data retrieved 2pm, Tue 6 Oct 2026 · Generated 10 Oct 2026, 9:55pm · Sample data · Made with Python (python-pptx)</a:t>
             </a:r>
           </a:p>
         </p:txBody>
